--- a/tests/patterns/fixtures/pptx-run-inheritance.pptx
+++ b/tests/patterns/fixtures/pptx-run-inheritance.pptx
@@ -538,11 +538,11 @@
                       </a:pPr>
                       <a:r>
                         <a:rPr/>
-                        <a:t>CELL INHERITS RED</a:t>
+                        <a:t>CELL TEXT</a:t>
                       </a:r>
                       <a:fld id="{0FBB9679-570D-4509-9600-E07789CF24BB}" type="datetime">
                         <a:rPr/>
-                        <a:t> FIELD RED</a:t>
+                        <a:t> FIELD TEXT</a:t>
                       </a:fld>
                     </a:p>
                   </a:txBody>
